--- a/webinar-slides/Worksheet_Self_Attack_Cycle_Map.pptx
+++ b/webinar-slides/Worksheet_Self_Attack_Cycle_Map.pptx
@@ -904,9 +904,8 @@
                 <a:solidFill>
                   <a:schemeClr val="tx2"/>
                 </a:solidFill>
-                <a:latin typeface="Vazirmatn" pitchFamily="34" charset="0"/>
-                <a:ea typeface="Vazirmatn" pitchFamily="34" charset="-122"/>
-                <a:cs typeface="Vazirmatn" pitchFamily="34" charset="-120"/>
+                <a:latin typeface="Arial" pitchFamily="34" charset="0"/>
+                <a:cs typeface="Arial" pitchFamily="34" charset="178"/>
               </a:rPr>
               <a:t>نقشه چرخه حمله به خود</a:t>
             </a:r>
@@ -943,9 +942,8 @@
                 <a:solidFill>
                   <a:schemeClr val="accent5"/>
                 </a:solidFill>
-                <a:latin typeface="Vazirmatn" pitchFamily="34" charset="0"/>
-                <a:ea typeface="Vazirmatn" pitchFamily="34" charset="-122"/>
-                <a:cs typeface="Vazirmatn" pitchFamily="34" charset="-120"/>
+                <a:latin typeface="Arial" pitchFamily="34" charset="0"/>
+                <a:cs typeface="Arial" pitchFamily="34" charset="178"/>
               </a:rPr>
               <a:t>یک تجربه واقعی و کوچک را انتخاب کنید و خانه‌ها را به ترتیب پر کنید.</a:t>
             </a:r>
@@ -1009,9 +1007,8 @@
                 <a:solidFill>
                   <a:schemeClr val="accent1"/>
                 </a:solidFill>
-                <a:latin typeface="Vazirmatn" pitchFamily="34" charset="0"/>
-                <a:ea typeface="Vazirmatn" pitchFamily="34" charset="-122"/>
-                <a:cs typeface="Vazirmatn" pitchFamily="34" charset="-120"/>
+                <a:latin typeface="Arial" pitchFamily="34" charset="0"/>
+                <a:cs typeface="Arial" pitchFamily="34" charset="178"/>
               </a:rPr>
               <a:t>۱</a:t>
             </a:r>
@@ -1051,9 +1048,8 @@
                 <a:solidFill>
                   <a:schemeClr val="tx1"/>
                 </a:solidFill>
-                <a:latin typeface="Vazirmatn" pitchFamily="34" charset="0"/>
-                <a:ea typeface="Vazirmatn" pitchFamily="34" charset="-122"/>
-                <a:cs typeface="Vazirmatn" pitchFamily="34" charset="-120"/>
+                <a:latin typeface="Arial" pitchFamily="34" charset="0"/>
+                <a:cs typeface="Arial" pitchFamily="34" charset="178"/>
               </a:rPr>
               <a:t>اتفاق</a:t>
             </a:r>
@@ -1093,9 +1089,8 @@
                 <a:solidFill>
                   <a:schemeClr val="accent5"/>
                 </a:solidFill>
-                <a:latin typeface="Vazirmatn" pitchFamily="34" charset="0"/>
-                <a:ea typeface="Vazirmatn" pitchFamily="34" charset="-122"/>
-                <a:cs typeface="Vazirmatn" pitchFamily="34" charset="-120"/>
+                <a:latin typeface="Arial" pitchFamily="34" charset="0"/>
+                <a:cs typeface="Arial" pitchFamily="34" charset="178"/>
               </a:rPr>
               <a:t>چه شد؟ فقط واقعیت.</a:t>
             </a:r>
@@ -1159,9 +1154,8 @@
                 <a:solidFill>
                   <a:schemeClr val="accent1"/>
                 </a:solidFill>
-                <a:latin typeface="Vazirmatn" pitchFamily="34" charset="0"/>
-                <a:ea typeface="Vazirmatn" pitchFamily="34" charset="-122"/>
-                <a:cs typeface="Vazirmatn" pitchFamily="34" charset="-120"/>
+                <a:latin typeface="Arial" pitchFamily="34" charset="0"/>
+                <a:cs typeface="Arial" pitchFamily="34" charset="178"/>
               </a:rPr>
               <a:t>۲</a:t>
             </a:r>
@@ -1201,9 +1195,8 @@
                 <a:solidFill>
                   <a:schemeClr val="tx1"/>
                 </a:solidFill>
-                <a:latin typeface="Vazirmatn" pitchFamily="34" charset="0"/>
-                <a:ea typeface="Vazirmatn" pitchFamily="34" charset="-122"/>
-                <a:cs typeface="Vazirmatn" pitchFamily="34" charset="-120"/>
+                <a:latin typeface="Arial" pitchFamily="34" charset="0"/>
+                <a:cs typeface="Arial" pitchFamily="34" charset="178"/>
               </a:rPr>
               <a:t>احساس اولیه</a:t>
             </a:r>
@@ -1243,9 +1236,8 @@
                 <a:solidFill>
                   <a:schemeClr val="accent5"/>
                 </a:solidFill>
-                <a:latin typeface="Vazirmatn" pitchFamily="34" charset="0"/>
-                <a:ea typeface="Vazirmatn" pitchFamily="34" charset="-122"/>
-                <a:cs typeface="Vazirmatn" pitchFamily="34" charset="-120"/>
+                <a:latin typeface="Arial" pitchFamily="34" charset="0"/>
+                <a:cs typeface="Arial" pitchFamily="34" charset="178"/>
               </a:rPr>
               <a:t>اولین احساس من چه بود؟</a:t>
             </a:r>
@@ -1309,9 +1301,8 @@
                 <a:solidFill>
                   <a:schemeClr val="accent1"/>
                 </a:solidFill>
-                <a:latin typeface="Vazirmatn" pitchFamily="34" charset="0"/>
-                <a:ea typeface="Vazirmatn" pitchFamily="34" charset="-122"/>
-                <a:cs typeface="Vazirmatn" pitchFamily="34" charset="-120"/>
+                <a:latin typeface="Arial" pitchFamily="34" charset="0"/>
+                <a:cs typeface="Arial" pitchFamily="34" charset="178"/>
               </a:rPr>
               <a:t>۳</a:t>
             </a:r>
@@ -1351,9 +1342,8 @@
                 <a:solidFill>
                   <a:schemeClr val="tx1"/>
                 </a:solidFill>
-                <a:latin typeface="Vazirmatn" pitchFamily="34" charset="0"/>
-                <a:ea typeface="Vazirmatn" pitchFamily="34" charset="-122"/>
-                <a:cs typeface="Vazirmatn" pitchFamily="34" charset="-120"/>
+                <a:latin typeface="Arial" pitchFamily="34" charset="0"/>
+                <a:cs typeface="Arial" pitchFamily="34" charset="178"/>
               </a:rPr>
               <a:t>جمله منتقد درونی</a:t>
             </a:r>
@@ -1393,9 +1383,8 @@
                 <a:solidFill>
                   <a:schemeClr val="accent5"/>
                 </a:solidFill>
-                <a:latin typeface="Vazirmatn" pitchFamily="34" charset="0"/>
-                <a:ea typeface="Vazirmatn" pitchFamily="34" charset="-122"/>
-                <a:cs typeface="Vazirmatn" pitchFamily="34" charset="-120"/>
+                <a:latin typeface="Arial" pitchFamily="34" charset="0"/>
+                <a:cs typeface="Arial" pitchFamily="34" charset="178"/>
               </a:rPr>
               <a:t>دقیقاً چه گفت؟</a:t>
             </a:r>
@@ -1459,9 +1448,8 @@
                 <a:solidFill>
                   <a:schemeClr val="accent1"/>
                 </a:solidFill>
-                <a:latin typeface="Vazirmatn" pitchFamily="34" charset="0"/>
-                <a:ea typeface="Vazirmatn" pitchFamily="34" charset="-122"/>
-                <a:cs typeface="Vazirmatn" pitchFamily="34" charset="-120"/>
+                <a:latin typeface="Arial" pitchFamily="34" charset="0"/>
+                <a:cs typeface="Arial" pitchFamily="34" charset="178"/>
               </a:rPr>
               <a:t>۴</a:t>
             </a:r>
@@ -1501,9 +1489,8 @@
                 <a:solidFill>
                   <a:schemeClr val="tx1"/>
                 </a:solidFill>
-                <a:latin typeface="Vazirmatn" pitchFamily="34" charset="0"/>
-                <a:ea typeface="Vazirmatn" pitchFamily="34" charset="-122"/>
-                <a:cs typeface="Vazirmatn" pitchFamily="34" charset="-120"/>
+                <a:latin typeface="Arial" pitchFamily="34" charset="0"/>
+                <a:cs typeface="Arial" pitchFamily="34" charset="178"/>
               </a:rPr>
               <a:t>نوع منتقد</a:t>
             </a:r>
@@ -1540,9 +1527,8 @@
                 <a:solidFill>
                   <a:schemeClr val="accent5"/>
                 </a:solidFill>
-                <a:latin typeface="Vazirmatn" pitchFamily="34" charset="0"/>
-                <a:ea typeface="Vazirmatn" pitchFamily="34" charset="-122"/>
-                <a:cs typeface="Vazirmatn" pitchFamily="34" charset="-120"/>
+                <a:latin typeface="Arial" pitchFamily="34" charset="0"/>
+                <a:cs typeface="Arial" pitchFamily="34" charset="178"/>
               </a:rPr>
               <a:t>Worrier · Not good enough · Hated self · Teamster · Non-feeler · Not good enough for others</a:t>
             </a:r>
@@ -1606,9 +1592,8 @@
                 <a:solidFill>
                   <a:schemeClr val="accent2"/>
                 </a:solidFill>
-                <a:latin typeface="Vazirmatn" pitchFamily="34" charset="0"/>
-                <a:ea typeface="Vazirmatn" pitchFamily="34" charset="-122"/>
-                <a:cs typeface="Vazirmatn" pitchFamily="34" charset="-120"/>
+                <a:latin typeface="Arial" pitchFamily="34" charset="0"/>
+                <a:cs typeface="Arial" pitchFamily="34" charset="178"/>
               </a:rPr>
               <a:t>۵</a:t>
             </a:r>
@@ -1648,9 +1633,8 @@
                 <a:solidFill>
                   <a:schemeClr val="tx1"/>
                 </a:solidFill>
-                <a:latin typeface="Vazirmatn" pitchFamily="34" charset="0"/>
-                <a:ea typeface="Vazirmatn" pitchFamily="34" charset="-122"/>
-                <a:cs typeface="Vazirmatn" pitchFamily="34" charset="-120"/>
+                <a:latin typeface="Arial" pitchFamily="34" charset="0"/>
+                <a:cs typeface="Arial" pitchFamily="34" charset="178"/>
               </a:rPr>
               <a:t>نیاز</a:t>
             </a:r>
@@ -1690,9 +1674,8 @@
                 <a:solidFill>
                   <a:schemeClr val="accent5"/>
                 </a:solidFill>
-                <a:latin typeface="Vazirmatn" pitchFamily="34" charset="0"/>
-                <a:ea typeface="Vazirmatn" pitchFamily="34" charset="-122"/>
-                <a:cs typeface="Vazirmatn" pitchFamily="34" charset="-120"/>
+                <a:latin typeface="Arial" pitchFamily="34" charset="0"/>
+                <a:cs typeface="Arial" pitchFamily="34" charset="178"/>
               </a:rPr>
               <a:t>چه چیزی برایم مهم بود؟</a:t>
             </a:r>
@@ -1756,9 +1739,8 @@
                 <a:solidFill>
                   <a:schemeClr val="accent2"/>
                 </a:solidFill>
-                <a:latin typeface="Vazirmatn" pitchFamily="34" charset="0"/>
-                <a:ea typeface="Vazirmatn" pitchFamily="34" charset="-122"/>
-                <a:cs typeface="Vazirmatn" pitchFamily="34" charset="-120"/>
+                <a:latin typeface="Arial" pitchFamily="34" charset="0"/>
+                <a:cs typeface="Arial" pitchFamily="34" charset="178"/>
               </a:rPr>
               <a:t>۶</a:t>
             </a:r>
@@ -1798,9 +1780,8 @@
                 <a:solidFill>
                   <a:schemeClr val="tx1"/>
                 </a:solidFill>
-                <a:latin typeface="Vazirmatn" pitchFamily="34" charset="0"/>
-                <a:ea typeface="Vazirmatn" pitchFamily="34" charset="-122"/>
-                <a:cs typeface="Vazirmatn" pitchFamily="34" charset="-120"/>
+                <a:latin typeface="Arial" pitchFamily="34" charset="0"/>
+                <a:cs typeface="Arial" pitchFamily="34" charset="178"/>
               </a:rPr>
               <a:t>خودحمایتی</a:t>
             </a:r>
@@ -1840,9 +1821,8 @@
                 <a:solidFill>
                   <a:schemeClr val="accent5"/>
                 </a:solidFill>
-                <a:latin typeface="Vazirmatn" pitchFamily="34" charset="0"/>
-                <a:ea typeface="Vazirmatn" pitchFamily="34" charset="-122"/>
-                <a:cs typeface="Vazirmatn" pitchFamily="34" charset="-120"/>
+                <a:latin typeface="Arial" pitchFamily="34" charset="0"/>
+                <a:cs typeface="Arial" pitchFamily="34" charset="178"/>
               </a:rPr>
               <a:t>چطور بدون حمله به خودم از خودم حمایت کنم؟</a:t>
             </a:r>
@@ -1906,9 +1886,8 @@
                 <a:solidFill>
                   <a:schemeClr val="accent2"/>
                 </a:solidFill>
-                <a:latin typeface="Vazirmatn" pitchFamily="34" charset="0"/>
-                <a:ea typeface="Vazirmatn" pitchFamily="34" charset="-122"/>
-                <a:cs typeface="Vazirmatn" pitchFamily="34" charset="-120"/>
+                <a:latin typeface="Arial" pitchFamily="34" charset="0"/>
+                <a:cs typeface="Arial" pitchFamily="34" charset="178"/>
               </a:rPr>
               <a:t>۷</a:t>
             </a:r>
@@ -1948,9 +1927,8 @@
                 <a:solidFill>
                   <a:schemeClr val="tx1"/>
                 </a:solidFill>
-                <a:latin typeface="Vazirmatn" pitchFamily="34" charset="0"/>
-                <a:ea typeface="Vazirmatn" pitchFamily="34" charset="-122"/>
-                <a:cs typeface="Vazirmatn" pitchFamily="34" charset="-120"/>
+                <a:latin typeface="Arial" pitchFamily="34" charset="0"/>
+                <a:cs typeface="Arial" pitchFamily="34" charset="178"/>
               </a:rPr>
               <a:t>خشم محافظتی / قاطعانه</a:t>
             </a:r>
@@ -1990,9 +1968,8 @@
                 <a:solidFill>
                   <a:schemeClr val="accent5"/>
                 </a:solidFill>
-                <a:latin typeface="Vazirmatn" pitchFamily="34" charset="0"/>
-                <a:ea typeface="Vazirmatn" pitchFamily="34" charset="-122"/>
-                <a:cs typeface="Vazirmatn" pitchFamily="34" charset="-120"/>
+                <a:latin typeface="Arial" pitchFamily="34" charset="0"/>
+                <a:cs typeface="Arial" pitchFamily="34" charset="178"/>
               </a:rPr>
               <a:t>این خشم از چه چیزی خبر می‌دهد؟</a:t>
             </a:r>
@@ -2056,9 +2033,8 @@
                 <a:solidFill>
                   <a:schemeClr val="accent2"/>
                 </a:solidFill>
-                <a:latin typeface="Vazirmatn" pitchFamily="34" charset="0"/>
-                <a:ea typeface="Vazirmatn" pitchFamily="34" charset="-122"/>
-                <a:cs typeface="Vazirmatn" pitchFamily="34" charset="-120"/>
+                <a:latin typeface="Arial" pitchFamily="34" charset="0"/>
+                <a:cs typeface="Arial" pitchFamily="34" charset="178"/>
               </a:rPr>
               <a:t>۸</a:t>
             </a:r>
@@ -2098,9 +2074,8 @@
                 <a:solidFill>
                   <a:schemeClr val="tx1"/>
                 </a:solidFill>
-                <a:latin typeface="Vazirmatn" pitchFamily="34" charset="0"/>
-                <a:ea typeface="Vazirmatn" pitchFamily="34" charset="-122"/>
-                <a:cs typeface="Vazirmatn" pitchFamily="34" charset="-120"/>
+                <a:latin typeface="Arial" pitchFamily="34" charset="0"/>
+                <a:cs typeface="Arial" pitchFamily="34" charset="178"/>
               </a:rPr>
               <a:t>مرز</a:t>
             </a:r>
@@ -2140,9 +2115,8 @@
                 <a:solidFill>
                   <a:schemeClr val="accent5"/>
                 </a:solidFill>
-                <a:latin typeface="Vazirmatn" pitchFamily="34" charset="0"/>
-                <a:ea typeface="Vazirmatn" pitchFamily="34" charset="-122"/>
-                <a:cs typeface="Vazirmatn" pitchFamily="34" charset="-120"/>
+                <a:latin typeface="Arial" pitchFamily="34" charset="0"/>
+                <a:cs typeface="Arial" pitchFamily="34" charset="178"/>
               </a:rPr>
               <a:t>چه مرز یا خواسته‌ای دارم؟</a:t>
             </a:r>
@@ -2206,9 +2180,8 @@
                 <a:solidFill>
                   <a:schemeClr val="accent2"/>
                 </a:solidFill>
-                <a:latin typeface="Vazirmatn" pitchFamily="34" charset="0"/>
-                <a:ea typeface="Vazirmatn" pitchFamily="34" charset="-122"/>
-                <a:cs typeface="Vazirmatn" pitchFamily="34" charset="-120"/>
+                <a:latin typeface="Arial" pitchFamily="34" charset="0"/>
+                <a:cs typeface="Arial" pitchFamily="34" charset="178"/>
               </a:rPr>
               <a:t>۹</a:t>
             </a:r>
@@ -2248,9 +2221,8 @@
                 <a:solidFill>
                   <a:schemeClr val="tx1"/>
                 </a:solidFill>
-                <a:latin typeface="Vazirmatn" pitchFamily="34" charset="0"/>
-                <a:ea typeface="Vazirmatn" pitchFamily="34" charset="-122"/>
-                <a:cs typeface="Vazirmatn" pitchFamily="34" charset="-120"/>
+                <a:latin typeface="Arial" pitchFamily="34" charset="0"/>
+                <a:cs typeface="Arial" pitchFamily="34" charset="178"/>
               </a:rPr>
               <a:t>اقدام</a:t>
             </a:r>
@@ -2290,9 +2262,8 @@
                 <a:solidFill>
                   <a:schemeClr val="accent5"/>
                 </a:solidFill>
-                <a:latin typeface="Vazirmatn" pitchFamily="34" charset="0"/>
-                <a:ea typeface="Vazirmatn" pitchFamily="34" charset="-122"/>
-                <a:cs typeface="Vazirmatn" pitchFamily="34" charset="-120"/>
+                <a:latin typeface="Arial" pitchFamily="34" charset="0"/>
+                <a:cs typeface="Arial" pitchFamily="34" charset="178"/>
               </a:rPr>
               <a:t>قدم بعدی من چیست؟</a:t>
             </a:r>
@@ -2329,9 +2300,8 @@
                 <a:solidFill>
                   <a:schemeClr val="accent5"/>
                 </a:solidFill>
-                <a:latin typeface="Vazirmatn" pitchFamily="34" charset="0"/>
-                <a:ea typeface="Vazirmatn" pitchFamily="34" charset="-122"/>
-                <a:cs typeface="Vazirmatn" pitchFamily="34" charset="-120"/>
+                <a:latin typeface="Arial" pitchFamily="34" charset="0"/>
+                <a:cs typeface="Arial" pitchFamily="34" charset="178"/>
               </a:rPr>
               <a:t>فرم آموزشی خودمشاهده‌گری؛ ابزار تشخیص نیست.</a:t>
             </a:r>
@@ -2390,9 +2360,9 @@
     </a:clrScheme>
     <a:fontScheme name="Cinnamon Cedar">
       <a:majorFont>
-        <a:latin typeface="Vazirmatn"/>
+        <a:latin typeface="Arial"/>
         <a:ea typeface=""/>
-        <a:cs typeface="Vazirmatn"/>
+        <a:cs typeface="Arial"/>
         <a:font script="Jpan" typeface="游ゴシック Light"/>
         <a:font script="Hang" typeface="맑은 고딕"/>
         <a:font script="Hans" typeface="等线 Light"/>
@@ -2442,9 +2412,9 @@
         <a:font script="Tfng" typeface="Ebrima"/>
       </a:majorFont>
       <a:minorFont>
-        <a:latin typeface="Vazirmatn"/>
+        <a:latin typeface="Arial"/>
         <a:ea typeface=""/>
-        <a:cs typeface="Vazirmatn"/>
+        <a:cs typeface="Arial"/>
         <a:font script="Jpan" typeface="游ゴシック"/>
         <a:font script="Hang" typeface="맑은 고딕"/>
         <a:font script="Hans" typeface="等线"/>

--- a/webinar-slides/Worksheet_Self_Attack_Cycle_Map.pptx
+++ b/webinar-slides/Worksheet_Self_Attack_Cycle_Map.pptx
@@ -1519,20 +1519,23 @@
           <a:bodyPr wrap="square" lIns="0" tIns="0" rIns="0" bIns="0" rtlCol="0" anchor="t"/>
           <a:lstStyle/>
           <a:p>
-            <a:pPr algn="r" indent="0" marL="0">
-              <a:buNone/>
-            </a:pPr>
-            <a:r>
-              <a:rPr lang="en-US" altLang="en-US" sz="1000" dirty="0">
+            <a:pPr rtl="1" algn="r" indent="0" marL="0">
+              <a:lnSpc>
+                <a:spcPct val="115000"/>
+              </a:lnSpc>
+              <a:buNone/>
+            </a:pPr>
+            <a:r>
+              <a:rPr lang="fa-IR" altLang="en-US" sz="1200" dirty="0">
                 <a:solidFill>
                   <a:schemeClr val="accent5"/>
                 </a:solidFill>
                 <a:latin typeface="Arial" pitchFamily="34" charset="0"/>
                 <a:cs typeface="Arial" pitchFamily="34" charset="178"/>
               </a:rPr>
-              <a:t>Worrier · Not good enough · Hated self · Teamster · Non-feeler · Not good enough for others</a:t>
-            </a:r>
-            <a:endParaRPr lang="en-US" sz="1000" dirty="0"/>
+              <a:t>نگران · کافی نیستی · خودت مشکلی · بیشتر تلاش کن · احساس نکن · برای دیگران کافی نیستی</a:t>
+            </a:r>
+            <a:endParaRPr lang="fa-IR" sz="1200" dirty="0"/>
           </a:p>
         </p:txBody>
       </p:sp>

--- a/webinar-slides/Worksheet_Self_Attack_Cycle_Map.pptx
+++ b/webinar-slides/Worksheet_Self_Attack_Cycle_Map.pptx
@@ -1506,8 +1506,8 @@
         </p:nvSpPr>
         <p:spPr>
           <a:xfrm>
-            <a:off x="5175504" y="5852160"/>
-            <a:ext cx="1655064" cy="1097280"/>
+            <a:off x="5175504" y="5806440"/>
+            <a:ext cx="1655064" cy="1325880"/>
           </a:xfrm>
           <a:prstGeom prst="rect">
             <a:avLst/>
@@ -1519,9 +1519,9 @@
           <a:bodyPr wrap="square" lIns="0" tIns="0" rIns="0" bIns="0" rtlCol="0" anchor="t"/>
           <a:lstStyle/>
           <a:p>
-            <a:pPr rtl="1" algn="r" indent="0" marL="0">
+            <a:pPr algn="r" indent="0" marL="0">
               <a:lnSpc>
-                <a:spcPct val="115000"/>
+                <a:spcPct val="105000"/>
               </a:lnSpc>
               <a:buNone/>
             </a:pPr>
@@ -1533,7 +1533,102 @@
                 <a:latin typeface="Arial" pitchFamily="34" charset="0"/>
                 <a:cs typeface="Arial" pitchFamily="34" charset="178"/>
               </a:rPr>
-              <a:t>نگران · کافی نیستی · خودت مشکلی · بیشتر تلاش کن · احساس نکن · برای دیگران کافی نیستی</a:t>
+              <a:t>نگران</a:t>
+            </a:r>
+            <a:endParaRPr lang="fa-IR" sz="1200" dirty="0"/>
+          </a:p>
+          <a:p>
+            <a:pPr algn="r" indent="0" marL="0">
+              <a:lnSpc>
+                <a:spcPct val="105000"/>
+              </a:lnSpc>
+              <a:buNone/>
+            </a:pPr>
+            <a:r>
+              <a:rPr lang="fa-IR" altLang="en-US" sz="1200" dirty="0">
+                <a:solidFill>
+                  <a:schemeClr val="accent5"/>
+                </a:solidFill>
+                <a:latin typeface="Arial" pitchFamily="34" charset="0"/>
+                <a:cs typeface="Arial" pitchFamily="34" charset="178"/>
+              </a:rPr>
+              <a:t>کافی نیستی</a:t>
+            </a:r>
+            <a:endParaRPr lang="fa-IR" sz="1200" dirty="0"/>
+          </a:p>
+          <a:p>
+            <a:pPr algn="r" indent="0" marL="0">
+              <a:lnSpc>
+                <a:spcPct val="105000"/>
+              </a:lnSpc>
+              <a:buNone/>
+            </a:pPr>
+            <a:r>
+              <a:rPr lang="fa-IR" altLang="en-US" sz="1200" dirty="0">
+                <a:solidFill>
+                  <a:schemeClr val="accent5"/>
+                </a:solidFill>
+                <a:latin typeface="Arial" pitchFamily="34" charset="0"/>
+                <a:cs typeface="Arial" pitchFamily="34" charset="178"/>
+              </a:rPr>
+              <a:t>خودت مشکلی</a:t>
+            </a:r>
+            <a:endParaRPr lang="fa-IR" sz="1200" dirty="0"/>
+          </a:p>
+          <a:p>
+            <a:pPr algn="r" indent="0" marL="0">
+              <a:lnSpc>
+                <a:spcPct val="105000"/>
+              </a:lnSpc>
+              <a:buNone/>
+            </a:pPr>
+            <a:r>
+              <a:rPr lang="fa-IR" altLang="en-US" sz="1200" dirty="0">
+                <a:solidFill>
+                  <a:schemeClr val="accent5"/>
+                </a:solidFill>
+                <a:latin typeface="Arial" pitchFamily="34" charset="0"/>
+                <a:cs typeface="Arial" pitchFamily="34" charset="178"/>
+              </a:rPr>
+              <a:t>بیشتر تلاش کن</a:t>
+            </a:r>
+            <a:endParaRPr lang="fa-IR" sz="1200" dirty="0"/>
+          </a:p>
+          <a:p>
+            <a:pPr algn="r" indent="0" marL="0">
+              <a:lnSpc>
+                <a:spcPct val="105000"/>
+              </a:lnSpc>
+              <a:buNone/>
+            </a:pPr>
+            <a:r>
+              <a:rPr lang="fa-IR" altLang="en-US" sz="1200" dirty="0">
+                <a:solidFill>
+                  <a:schemeClr val="accent5"/>
+                </a:solidFill>
+                <a:latin typeface="Arial" pitchFamily="34" charset="0"/>
+                <a:cs typeface="Arial" pitchFamily="34" charset="178"/>
+              </a:rPr>
+              <a:t>احساس نکن</a:t>
+            </a:r>
+            <a:endParaRPr lang="fa-IR" sz="1200" dirty="0"/>
+          </a:p>
+          <a:p>
+            <a:pPr algn="r" indent="0" marL="0">
+              <a:lnSpc>
+                <a:spcPct val="105000"/>
+              </a:lnSpc>
+              <a:buNone/>
+            </a:pPr>
+            <a:r>
+              <a:rPr lang="fa-IR" altLang="en-US" sz="1200" dirty="0">
+                <a:solidFill>
+                  <a:schemeClr val="accent5"/>
+                </a:solidFill>
+                <a:latin typeface="Arial" pitchFamily="34" charset="0"/>
+                <a:cs typeface="Arial" pitchFamily="34" charset="178"/>
+              </a:rPr>
+              <a:t>برای دیگران کافی نیستی</a:t>
             </a:r>
             <a:endParaRPr lang="fa-IR" sz="1200" dirty="0"/>
           </a:p>
